--- a/media/resources/files/ButunSandardyJanaOnduktardy_Koshuu_XjanaO_Tvu8bx8.pptx
+++ b/media/resources/files/ButunSandardyJanaOnduktardy_Koshuu_XjanaO_Tvu8bx8.pptx
@@ -10422,7 +10422,7 @@
                 <a:ea typeface="+mn-ea"/>
                 <a:cs typeface="+mn-cs"/>
               </a:rPr>
-              <a:t>Турдуу пикирлер учун ыраазычылык билдиребиз.</a:t>
+              <a:t>Түрдүү пикирлер үчүн ыраазычылык билдиребиз.</a:t>
             </a:r>
           </a:p>
           <a:p>

--- a/media/resources/files/ButunSandardyJanaOnduktardy_Koshuu_XjanaO_Tvu8bx8.pptx
+++ b/media/resources/files/ButunSandardyJanaOnduktardy_Koshuu_XjanaO_Tvu8bx8.pptx
@@ -3935,7 +3935,7 @@
                 <a:ea typeface="+mn-ea"/>
                 <a:cs typeface="Arial" panose="020B0604020202020204" pitchFamily="34" charset="0"/>
               </a:rPr>
-              <a:t>Мугалим үчүн жооп баракчасы жана таратма материалдар камтылган.</a:t>
+              <a:t>Мугалим үчүн жооп барагы жана таратма материалдар бар.</a:t>
             </a:r>
           </a:p>
           <a:p>
@@ -4004,7 +4004,7 @@
                 <a:ea typeface="+mn-ea"/>
                 <a:cs typeface="Arial" panose="020B0604020202020204" pitchFamily="34" charset="0"/>
               </a:rPr>
-              <a:t>Кайсы команда туура жооп бергенине жараша '</a:t>
+              <a:t>Туура жооп берген командага жараша «</a:t>
             </a:r>
             <a:r>
               <a:rPr kumimoji="0" lang="en-GB" sz="2000" b="0" i="0" u="sng" strike="noStrike" kern="1200" cap="none" spc="0" normalizeH="0" baseline="0" noProof="0" dirty="0">
@@ -4021,7 +4021,7 @@
                 <a:ea typeface="+mn-ea"/>
                 <a:cs typeface="Arial" panose="020B0604020202020204" pitchFamily="34" charset="0"/>
               </a:rPr>
-              <a:t>X' </a:t>
+              <a:t>X» </a:t>
             </a:r>
             <a:r>
               <a:rPr kumimoji="0" lang="ru-RU" sz="2000" b="0" i="0" u="sng" strike="noStrike" kern="1200" cap="none" spc="0" normalizeH="0" baseline="0" noProof="0" dirty="0">
@@ -4038,7 +4038,7 @@
                 <a:ea typeface="+mn-ea"/>
                 <a:cs typeface="Arial" panose="020B0604020202020204" pitchFamily="34" charset="0"/>
               </a:rPr>
-              <a:t>же '</a:t>
+              <a:t>же «</a:t>
             </a:r>
             <a:r>
               <a:rPr kumimoji="0" lang="en-GB" sz="2000" b="0" i="0" u="sng" strike="noStrike" kern="1200" cap="none" spc="0" normalizeH="0" baseline="0" noProof="0" dirty="0">
@@ -4055,7 +4055,7 @@
                 <a:ea typeface="+mn-ea"/>
                 <a:cs typeface="Arial" panose="020B0604020202020204" pitchFamily="34" charset="0"/>
               </a:rPr>
-              <a:t>O' </a:t>
+              <a:t>O» </a:t>
             </a:r>
             <a:r>
               <a:rPr kumimoji="0" lang="ru-RU" sz="2000" b="0" i="0" u="sng" strike="noStrike" kern="1200" cap="none" spc="0" normalizeH="0" baseline="0" noProof="0" dirty="0">
@@ -4072,7 +4072,7 @@
                 <a:ea typeface="+mn-ea"/>
                 <a:cs typeface="Arial" panose="020B0604020202020204" pitchFamily="34" charset="0"/>
               </a:rPr>
-              <a:t>баскычын басыңыз/тийип коюңуз</a:t>
+              <a:t>баскычын басыңыз</a:t>
             </a:r>
             <a:r>
               <a:rPr kumimoji="0" lang="en-GB" sz="2000" b="0" i="0" u="none" strike="noStrike" kern="1200" cap="none" spc="0" normalizeH="0" baseline="0" noProof="0" dirty="0">
@@ -4818,7 +4818,7 @@
                   <a:schemeClr val="tx1"/>
                 </a:solidFill>
               </a:rPr>
-              <a:t>0.4</a:t>
+              <a:t>0,4</a:t>
             </a:r>
             <a:endParaRPr lang="en-GB" sz="2800" dirty="0">
               <a:solidFill>
@@ -4892,7 +4892,7 @@
                   <a:schemeClr val="tx1"/>
                 </a:solidFill>
               </a:rPr>
-              <a:t>1.12</a:t>
+              <a:t>1,12</a:t>
             </a:r>
             <a:endParaRPr lang="en-GB" sz="2800" dirty="0">
               <a:solidFill>
@@ -5040,7 +5040,7 @@
                   <a:schemeClr val="tx1"/>
                 </a:solidFill>
               </a:rPr>
-              <a:t>2.4</a:t>
+              <a:t>2,4</a:t>
             </a:r>
             <a:endParaRPr lang="en-GB" sz="2800" dirty="0">
               <a:solidFill>
@@ -5114,7 +5114,7 @@
                   <a:schemeClr val="tx1"/>
                 </a:solidFill>
               </a:rPr>
-              <a:t>5.50</a:t>
+              <a:t>5,50</a:t>
             </a:r>
             <a:endParaRPr lang="en-GB" sz="2800" dirty="0">
               <a:solidFill>
@@ -5262,7 +5262,7 @@
                   <a:schemeClr val="tx1"/>
                 </a:solidFill>
               </a:rPr>
-              <a:t>0.7</a:t>
+              <a:t>0,7</a:t>
             </a:r>
             <a:endParaRPr lang="en-GB" sz="2800" dirty="0">
               <a:solidFill>
@@ -5336,7 +5336,7 @@
                   <a:schemeClr val="tx1"/>
                 </a:solidFill>
               </a:rPr>
-              <a:t>2.12</a:t>
+              <a:t>2,12</a:t>
             </a:r>
             <a:endParaRPr lang="en-GB" sz="2800" dirty="0">
               <a:solidFill>
@@ -5484,7 +5484,7 @@
                   <a:schemeClr val="tx1"/>
                 </a:solidFill>
               </a:rPr>
-              <a:t>4.8</a:t>
+              <a:t>4,8</a:t>
             </a:r>
             <a:endParaRPr lang="en-GB" sz="2800" dirty="0">
               <a:solidFill>
@@ -5558,7 +5558,7 @@
                   <a:schemeClr val="tx1"/>
                 </a:solidFill>
               </a:rPr>
-              <a:t>0.31</a:t>
+              <a:t>0,31</a:t>
             </a:r>
             <a:endParaRPr lang="en-GB" sz="2800" dirty="0">
               <a:solidFill>
@@ -5706,7 +5706,7 @@
                   <a:schemeClr val="tx1"/>
                 </a:solidFill>
               </a:rPr>
-              <a:t>2.14</a:t>
+              <a:t>2,14</a:t>
             </a:r>
             <a:endParaRPr lang="en-GB" sz="2800" dirty="0">
               <a:solidFill>
@@ -5780,7 +5780,7 @@
                   <a:schemeClr val="tx1"/>
                 </a:solidFill>
               </a:rPr>
-              <a:t>1.09</a:t>
+              <a:t>1,09</a:t>
             </a:r>
             <a:endParaRPr lang="en-GB" sz="2800" dirty="0">
               <a:solidFill>
@@ -5928,7 +5928,7 @@
                   <a:schemeClr val="tx1"/>
                 </a:solidFill>
               </a:rPr>
-              <a:t>2.61</a:t>
+              <a:t>2,61</a:t>
             </a:r>
             <a:endParaRPr lang="en-GB" sz="2800" dirty="0">
               <a:solidFill>
@@ -6002,7 +6002,7 @@
                   <a:schemeClr val="tx1"/>
                 </a:solidFill>
               </a:rPr>
-              <a:t>5.6</a:t>
+              <a:t>5,6</a:t>
             </a:r>
             <a:endParaRPr lang="en-GB" sz="2800" dirty="0">
               <a:solidFill>
@@ -6150,7 +6150,7 @@
                   <a:schemeClr val="tx1"/>
                 </a:solidFill>
               </a:rPr>
-              <a:t>3.6</a:t>
+              <a:t>3,6</a:t>
             </a:r>
             <a:endParaRPr lang="en-GB" sz="2800" dirty="0">
               <a:solidFill>
@@ -6224,7 +6224,7 @@
                   <a:schemeClr val="tx1"/>
                 </a:solidFill>
               </a:rPr>
-              <a:t>2.57</a:t>
+              <a:t>2,57</a:t>
             </a:r>
             <a:endParaRPr lang="en-GB" sz="2800" dirty="0">
               <a:solidFill>
@@ -6372,7 +6372,7 @@
                   <a:schemeClr val="tx1"/>
                 </a:solidFill>
               </a:rPr>
-              <a:t>0.42</a:t>
+              <a:t>0,42</a:t>
             </a:r>
             <a:endParaRPr lang="en-GB" sz="2800" dirty="0">
               <a:solidFill>
@@ -6446,7 +6446,7 @@
                   <a:schemeClr val="tx1"/>
                 </a:solidFill>
               </a:rPr>
-              <a:t>2.3</a:t>
+              <a:t>2,3</a:t>
             </a:r>
             <a:endParaRPr lang="en-GB" sz="2800" dirty="0">
               <a:solidFill>
@@ -6594,7 +6594,7 @@
                   <a:schemeClr val="tx1"/>
                 </a:solidFill>
               </a:rPr>
-              <a:t>2.7</a:t>
+              <a:t>2,7</a:t>
             </a:r>
             <a:endParaRPr lang="en-GB" sz="2800" dirty="0">
               <a:solidFill>
@@ -6668,7 +6668,7 @@
                   <a:schemeClr val="tx1"/>
                 </a:solidFill>
               </a:rPr>
-              <a:t>3.08</a:t>
+              <a:t>3,08</a:t>
             </a:r>
             <a:endParaRPr lang="en-GB" sz="2800" dirty="0">
               <a:solidFill>
